--- a/classes/parte-4-seguridad-de-aplicaciones-web/114-bug-bounty-metodologia-y-plataformas/clase-114-presentacion.pptx
+++ b/classes/parte-4-seguridad-de-aplicaciones-web/114-bug-bounty-metodologia-y-plataformas/clase-114-presentacion.pptx
@@ -17,6 +17,9 @@
     <p:sldId id="265" r:id="rId16"/>
     <p:sldId id="266" r:id="rId17"/>
     <p:sldId id="267" r:id="rId18"/>
+    <p:sldId id="268" r:id="rId19"/>
+    <p:sldId id="269" r:id="rId20"/>
+    <p:sldId id="270" r:id="rId21"/>
   </p:sldIdLst>
   <p:sldSz cx="9144000" cy="6858000" type="screen4x3"/>
   <p:notesSz cx="6858000" cy="9144000"/>
@@ -3198,7 +3201,7 @@
                   <a:srgbClr val="0B3D2E"/>
                 </a:solidFill>
               </a:rPr>
-              <a:t>⚠️ Errores comunes</a:t>
+              <a:t>✍️ Ejercicios</a:t>
             </a:r>
           </a:p>
         </p:txBody>
@@ -3236,67 +3239,82 @@
                   <a:srgbClr val="22282E"/>
                 </a:solidFill>
               </a:rPr>
-              <a:t>•  Reporte rechazado por irreproducible — Faltan pasos/versión/contexto; detalla el PoC</a:t>
-            </a:r>
-          </a:p>
-          <a:p>
-            <a:pPr>
-              <a:spcAft>
-                <a:spcPts val="600"/>
-              </a:spcAft>
-            </a:pPr>
-            <a:r>
-              <a:rPr sz="1500">
-                <a:solidFill>
-                  <a:srgbClr val="22282E"/>
-                </a:solidFill>
-              </a:rPr>
-              <a:t>•  "Out of scope" — Probaste un activo no permitido; respeta el scope</a:t>
-            </a:r>
-          </a:p>
-          <a:p>
-            <a:pPr>
-              <a:spcAft>
-                <a:spcPts val="600"/>
-              </a:spcAft>
-            </a:pPr>
-            <a:r>
-              <a:rPr sz="1500">
-                <a:solidFill>
-                  <a:srgbClr val="22282E"/>
-                </a:solidFill>
-              </a:rPr>
-              <a:t>•  Marcado como duplicado — Otro llegó antes; prioriza velocidad y originalidad</a:t>
-            </a:r>
-          </a:p>
-          <a:p>
-            <a:pPr>
-              <a:spcAft>
-                <a:spcPts val="600"/>
-              </a:spcAft>
-            </a:pPr>
-            <a:r>
-              <a:rPr sz="1500">
-                <a:solidFill>
-                  <a:srgbClr val="22282E"/>
-                </a:solidFill>
-              </a:rPr>
-              <a:t>•  Severidad inflada — Ajusta el impacto real; usa CVSS honesto</a:t>
-            </a:r>
-          </a:p>
-          <a:p>
-            <a:pPr>
-              <a:spcAft>
-                <a:spcPts val="600"/>
-              </a:spcAft>
-            </a:pPr>
-            <a:r>
-              <a:rPr sz="1500">
-                <a:solidFill>
-                  <a:srgbClr val="22282E"/>
-                </a:solidFill>
-              </a:rPr>
-              <a:t>•  Baja recompensa — Impacto mal explicado; conecta el bug con daño de negocio</a:t>
+              <a:t>•  Resume el scope y las reglas de un programa real en 5 puntos.</a:t>
+            </a:r>
+          </a:p>
+          <a:p>
+            <a:pPr>
+              <a:spcAft>
+                <a:spcPts val="600"/>
+              </a:spcAft>
+            </a:pPr>
+            <a:r>
+              <a:rPr sz="1500">
+                <a:solidFill>
+                  <a:srgbClr val="22282E"/>
+                </a:solidFill>
+              </a:rPr>
+              <a:t>•  Diseña tu pipeline de reconocimiento con comandos concretos.</a:t>
+            </a:r>
+          </a:p>
+          <a:p>
+            <a:pPr>
+              <a:spcAft>
+                <a:spcPts val="600"/>
+              </a:spcAft>
+            </a:pPr>
+            <a:r>
+              <a:rPr sz="1500">
+                <a:solidFill>
+                  <a:srgbClr val="22282E"/>
+                </a:solidFill>
+              </a:rPr>
+              <a:t>•  Prioriza 5 vectores de una app hipotética por probabilidad × impacto.</a:t>
+            </a:r>
+          </a:p>
+          <a:p>
+            <a:pPr>
+              <a:spcAft>
+                <a:spcPts val="600"/>
+              </a:spcAft>
+            </a:pPr>
+            <a:r>
+              <a:rPr sz="1500">
+                <a:solidFill>
+                  <a:srgbClr val="22282E"/>
+                </a:solidFill>
+              </a:rPr>
+              <a:t>•  Redacta un reporte de un XSS almacenado de Juice Shop con todos los apartados.</a:t>
+            </a:r>
+          </a:p>
+          <a:p>
+            <a:pPr>
+              <a:spcAft>
+                <a:spcPts val="600"/>
+              </a:spcAft>
+            </a:pPr>
+            <a:r>
+              <a:rPr sz="1500">
+                <a:solidFill>
+                  <a:srgbClr val="22282E"/>
+                </a:solidFill>
+              </a:rPr>
+              <a:t>•  Calcula el CVSS de ese XSS y explica cada métrica.</a:t>
+            </a:r>
+          </a:p>
+          <a:p>
+            <a:pPr>
+              <a:spcAft>
+                <a:spcPts val="600"/>
+              </a:spcAft>
+            </a:pPr>
+            <a:r>
+              <a:rPr sz="1500">
+                <a:solidFill>
+                  <a:srgbClr val="22282E"/>
+                </a:solidFill>
+              </a:rPr>
+              <a:t>•  Explica qué es el safe harbor y por qué importa legalmente.</a:t>
             </a:r>
           </a:p>
         </p:txBody>
@@ -3347,7 +3365,7 @@
                   <a:srgbClr val="0B3D2E"/>
                 </a:solidFill>
               </a:rPr>
-              <a:t>❓ Preguntas frecuentes</a:t>
+              <a:t>📝 Reto verificable</a:t>
             </a:r>
           </a:p>
         </p:txBody>
@@ -3385,82 +3403,22 @@
                   <a:srgbClr val="22282E"/>
                 </a:solidFill>
               </a:rPr>
-              <a:t>•  ❓ ¿El bug bounty es legal?</a:t>
-            </a:r>
-          </a:p>
-          <a:p>
-            <a:pPr>
-              <a:spcAft>
-                <a:spcPts val="600"/>
-              </a:spcAft>
-            </a:pPr>
-            <a:r>
-              <a:rPr sz="1500">
-                <a:solidFill>
-                  <a:srgbClr val="22282E"/>
-                </a:solidFill>
-              </a:rPr>
-              <a:t>•  Sí, mientras te ciñas al scope y las reglas del programa (safe harbor). Fuera de ahí, no hay autorización.</a:t>
-            </a:r>
-          </a:p>
-          <a:p>
-            <a:pPr>
-              <a:spcAft>
-                <a:spcPts val="600"/>
-              </a:spcAft>
-            </a:pPr>
-            <a:r>
-              <a:rPr sz="1500">
-                <a:solidFill>
-                  <a:srgbClr val="22282E"/>
-                </a:solidFill>
-              </a:rPr>
-              <a:t>•  ❓ ¿Qué diferencia un buen reporte de uno malo?</a:t>
-            </a:r>
-          </a:p>
-          <a:p>
-            <a:pPr>
-              <a:spcAft>
-                <a:spcPts val="600"/>
-              </a:spcAft>
-            </a:pPr>
-            <a:r>
-              <a:rPr sz="1500">
-                <a:solidFill>
-                  <a:srgbClr val="22282E"/>
-                </a:solidFill>
-              </a:rPr>
-              <a:t>•  La reproducibilidad y la claridad del impacto. Un triager debe poder replicar el bug y entender su gravedad sin esfuerzo.</a:t>
-            </a:r>
-          </a:p>
-          <a:p>
-            <a:pPr>
-              <a:spcAft>
-                <a:spcPts val="600"/>
-              </a:spcAft>
-            </a:pPr>
-            <a:r>
-              <a:rPr sz="1500">
-                <a:solidFill>
-                  <a:srgbClr val="22282E"/>
-                </a:solidFill>
-              </a:rPr>
-              <a:t>•  ❓ ¿Automatizo todo con nuclei?</a:t>
-            </a:r>
-          </a:p>
-          <a:p>
-            <a:pPr>
-              <a:spcAft>
-                <a:spcPts val="600"/>
-              </a:spcAft>
-            </a:pPr>
-            <a:r>
-              <a:rPr sz="1500">
-                <a:solidFill>
-                  <a:srgbClr val="22282E"/>
-                </a:solidFill>
-              </a:rPr>
-              <a:t>•  La automatización ayuda en recon y detección superficial, pero los bugs bien pagados suelen requerir análisis manual y creatividad.</a:t>
+              <a:t>•  Escribe un reporte de bug bounty completo y reproducible de una vulnerabilidad hallada en tu laboratorio, con CVSS calculado y sección de remediación.</a:t>
+            </a:r>
+          </a:p>
+          <a:p>
+            <a:pPr>
+              <a:spcAft>
+                <a:spcPts val="600"/>
+              </a:spcAft>
+            </a:pPr>
+            <a:r>
+              <a:rPr sz="1500">
+                <a:solidFill>
+                  <a:srgbClr val="22282E"/>
+                </a:solidFill>
+              </a:rPr>
+              <a:t>•  Criterio de aceptación: un tercero puede reproducir el bug siguiendo solo tu reporte; incluye título, impacto de negocio, pasos con PoC, CVSS justificado y remediación accionable.</a:t>
             </a:r>
           </a:p>
         </p:txBody>
@@ -3511,7 +3469,7 @@
                   <a:srgbClr val="0B3D2E"/>
                 </a:solidFill>
               </a:rPr>
-              <a:t>🔗 Referencias</a:t>
+              <a:t>⚠️ Errores comunes</a:t>
             </a:r>
           </a:p>
         </p:txBody>
@@ -3549,6 +3507,319 @@
                   <a:srgbClr val="22282E"/>
                 </a:solidFill>
               </a:rPr>
+              <a:t>•  Reporte rechazado por irreproducible — Faltan pasos/versión/contexto; detalla el PoC</a:t>
+            </a:r>
+          </a:p>
+          <a:p>
+            <a:pPr>
+              <a:spcAft>
+                <a:spcPts val="600"/>
+              </a:spcAft>
+            </a:pPr>
+            <a:r>
+              <a:rPr sz="1500">
+                <a:solidFill>
+                  <a:srgbClr val="22282E"/>
+                </a:solidFill>
+              </a:rPr>
+              <a:t>•  "Out of scope" — Probaste un activo no permitido; respeta el scope</a:t>
+            </a:r>
+          </a:p>
+          <a:p>
+            <a:pPr>
+              <a:spcAft>
+                <a:spcPts val="600"/>
+              </a:spcAft>
+            </a:pPr>
+            <a:r>
+              <a:rPr sz="1500">
+                <a:solidFill>
+                  <a:srgbClr val="22282E"/>
+                </a:solidFill>
+              </a:rPr>
+              <a:t>•  Marcado como duplicado — Otro llegó antes; prioriza velocidad y originalidad</a:t>
+            </a:r>
+          </a:p>
+          <a:p>
+            <a:pPr>
+              <a:spcAft>
+                <a:spcPts val="600"/>
+              </a:spcAft>
+            </a:pPr>
+            <a:r>
+              <a:rPr sz="1500">
+                <a:solidFill>
+                  <a:srgbClr val="22282E"/>
+                </a:solidFill>
+              </a:rPr>
+              <a:t>•  Severidad inflada — Ajusta el impacto real; usa CVSS honesto</a:t>
+            </a:r>
+          </a:p>
+          <a:p>
+            <a:pPr>
+              <a:spcAft>
+                <a:spcPts val="600"/>
+              </a:spcAft>
+            </a:pPr>
+            <a:r>
+              <a:rPr sz="1500">
+                <a:solidFill>
+                  <a:srgbClr val="22282E"/>
+                </a:solidFill>
+              </a:rPr>
+              <a:t>•  Baja recompensa — Impacto mal explicado; conecta el bug con daño de negocio</a:t>
+            </a:r>
+          </a:p>
+        </p:txBody>
+      </p:sp>
+    </p:spTree>
+  </p:cSld>
+  <p:clrMapOvr>
+    <a:masterClrMapping/>
+  </p:clrMapOvr>
+</p:sld>
+</file>
+
+<file path=ppt/slides/slide13.xml><?xml version="1.0" encoding="utf-8"?>
+<p:sld xmlns:a="http://schemas.openxmlformats.org/drawingml/2006/main" xmlns:p="http://schemas.openxmlformats.org/presentationml/2006/main" xmlns:r="http://schemas.openxmlformats.org/officeDocument/2006/relationships">
+  <p:cSld>
+    <p:spTree>
+      <p:nvGrpSpPr>
+        <p:cNvPr id="1" name=""/>
+        <p:cNvGrpSpPr/>
+        <p:nvPr/>
+      </p:nvGrpSpPr>
+      <p:grpSpPr/>
+      <p:sp>
+        <p:nvSpPr>
+          <p:cNvPr id="2" name="TextBox 1"/>
+          <p:cNvSpPr txBox="1"/>
+          <p:nvPr/>
+        </p:nvSpPr>
+        <p:spPr>
+          <a:xfrm>
+            <a:off x="457200" y="320040"/>
+            <a:ext cx="8229600" cy="822960"/>
+          </a:xfrm>
+          <a:prstGeom prst="rect">
+            <a:avLst/>
+          </a:prstGeom>
+          <a:noFill/>
+        </p:spPr>
+        <p:txBody>
+          <a:bodyPr wrap="square">
+            <a:spAutoFit/>
+          </a:bodyPr>
+          <a:lstStyle/>
+          <a:p>
+            <a:r>
+              <a:rPr sz="2600" b="1">
+                <a:solidFill>
+                  <a:srgbClr val="0B3D2E"/>
+                </a:solidFill>
+              </a:rPr>
+              <a:t>❓ Preguntas frecuentes</a:t>
+            </a:r>
+          </a:p>
+        </p:txBody>
+      </p:sp>
+      <p:sp>
+        <p:nvSpPr>
+          <p:cNvPr id="3" name="TextBox 2"/>
+          <p:cNvSpPr txBox="1"/>
+          <p:nvPr/>
+        </p:nvSpPr>
+        <p:spPr>
+          <a:xfrm>
+            <a:off x="457200" y="1280160"/>
+            <a:ext cx="8229600" cy="4937760"/>
+          </a:xfrm>
+          <a:prstGeom prst="rect">
+            <a:avLst/>
+          </a:prstGeom>
+          <a:noFill/>
+        </p:spPr>
+        <p:txBody>
+          <a:bodyPr wrap="square">
+            <a:spAutoFit/>
+          </a:bodyPr>
+          <a:lstStyle/>
+          <a:p>
+            <a:pPr>
+              <a:spcAft>
+                <a:spcPts val="600"/>
+              </a:spcAft>
+            </a:pPr>
+            <a:r>
+              <a:rPr sz="1500">
+                <a:solidFill>
+                  <a:srgbClr val="22282E"/>
+                </a:solidFill>
+              </a:rPr>
+              <a:t>•  ❓ ¿El bug bounty es legal?</a:t>
+            </a:r>
+          </a:p>
+          <a:p>
+            <a:pPr>
+              <a:spcAft>
+                <a:spcPts val="600"/>
+              </a:spcAft>
+            </a:pPr>
+            <a:r>
+              <a:rPr sz="1500">
+                <a:solidFill>
+                  <a:srgbClr val="22282E"/>
+                </a:solidFill>
+              </a:rPr>
+              <a:t>•  Sí, mientras te ciñas al scope y las reglas del programa (safe harbor). Fuera de ahí, no hay autorización.</a:t>
+            </a:r>
+          </a:p>
+          <a:p>
+            <a:pPr>
+              <a:spcAft>
+                <a:spcPts val="600"/>
+              </a:spcAft>
+            </a:pPr>
+            <a:r>
+              <a:rPr sz="1500">
+                <a:solidFill>
+                  <a:srgbClr val="22282E"/>
+                </a:solidFill>
+              </a:rPr>
+              <a:t>•  ❓ ¿Qué diferencia un buen reporte de uno malo?</a:t>
+            </a:r>
+          </a:p>
+          <a:p>
+            <a:pPr>
+              <a:spcAft>
+                <a:spcPts val="600"/>
+              </a:spcAft>
+            </a:pPr>
+            <a:r>
+              <a:rPr sz="1500">
+                <a:solidFill>
+                  <a:srgbClr val="22282E"/>
+                </a:solidFill>
+              </a:rPr>
+              <a:t>•  La reproducibilidad y la claridad del impacto. Un triager debe poder replicar el bug y entender su gravedad sin esfuerzo.</a:t>
+            </a:r>
+          </a:p>
+          <a:p>
+            <a:pPr>
+              <a:spcAft>
+                <a:spcPts val="600"/>
+              </a:spcAft>
+            </a:pPr>
+            <a:r>
+              <a:rPr sz="1500">
+                <a:solidFill>
+                  <a:srgbClr val="22282E"/>
+                </a:solidFill>
+              </a:rPr>
+              <a:t>•  ❓ ¿Automatizo todo con nuclei?</a:t>
+            </a:r>
+          </a:p>
+          <a:p>
+            <a:pPr>
+              <a:spcAft>
+                <a:spcPts val="600"/>
+              </a:spcAft>
+            </a:pPr>
+            <a:r>
+              <a:rPr sz="1500">
+                <a:solidFill>
+                  <a:srgbClr val="22282E"/>
+                </a:solidFill>
+              </a:rPr>
+              <a:t>•  La automatización ayuda en recon y detección superficial, pero los bugs bien pagados suelen requerir análisis manual y creatividad.</a:t>
+            </a:r>
+          </a:p>
+        </p:txBody>
+      </p:sp>
+    </p:spTree>
+  </p:cSld>
+  <p:clrMapOvr>
+    <a:masterClrMapping/>
+  </p:clrMapOvr>
+</p:sld>
+</file>
+
+<file path=ppt/slides/slide14.xml><?xml version="1.0" encoding="utf-8"?>
+<p:sld xmlns:a="http://schemas.openxmlformats.org/drawingml/2006/main" xmlns:p="http://schemas.openxmlformats.org/presentationml/2006/main" xmlns:r="http://schemas.openxmlformats.org/officeDocument/2006/relationships">
+  <p:cSld>
+    <p:spTree>
+      <p:nvGrpSpPr>
+        <p:cNvPr id="1" name=""/>
+        <p:cNvGrpSpPr/>
+        <p:nvPr/>
+      </p:nvGrpSpPr>
+      <p:grpSpPr/>
+      <p:sp>
+        <p:nvSpPr>
+          <p:cNvPr id="2" name="TextBox 1"/>
+          <p:cNvSpPr txBox="1"/>
+          <p:nvPr/>
+        </p:nvSpPr>
+        <p:spPr>
+          <a:xfrm>
+            <a:off x="457200" y="320040"/>
+            <a:ext cx="8229600" cy="822960"/>
+          </a:xfrm>
+          <a:prstGeom prst="rect">
+            <a:avLst/>
+          </a:prstGeom>
+          <a:noFill/>
+        </p:spPr>
+        <p:txBody>
+          <a:bodyPr wrap="square">
+            <a:spAutoFit/>
+          </a:bodyPr>
+          <a:lstStyle/>
+          <a:p>
+            <a:r>
+              <a:rPr sz="2600" b="1">
+                <a:solidFill>
+                  <a:srgbClr val="0B3D2E"/>
+                </a:solidFill>
+              </a:rPr>
+              <a:t>🔗 Referencias</a:t>
+            </a:r>
+          </a:p>
+        </p:txBody>
+      </p:sp>
+      <p:sp>
+        <p:nvSpPr>
+          <p:cNvPr id="3" name="TextBox 2"/>
+          <p:cNvSpPr txBox="1"/>
+          <p:nvPr/>
+        </p:nvSpPr>
+        <p:spPr>
+          <a:xfrm>
+            <a:off x="457200" y="1280160"/>
+            <a:ext cx="8229600" cy="4937760"/>
+          </a:xfrm>
+          <a:prstGeom prst="rect">
+            <a:avLst/>
+          </a:prstGeom>
+          <a:noFill/>
+        </p:spPr>
+        <p:txBody>
+          <a:bodyPr wrap="square">
+            <a:spAutoFit/>
+          </a:bodyPr>
+          <a:lstStyle/>
+          <a:p>
+            <a:pPr>
+              <a:spcAft>
+                <a:spcPts val="600"/>
+              </a:spcAft>
+            </a:pPr>
+            <a:r>
+              <a:rPr sz="1500">
+                <a:solidFill>
+                  <a:srgbClr val="22282E"/>
+                </a:solidFill>
+              </a:rPr>
               <a:t>•  Li, Bug Bounty Bootcamp, No Starch Press.</a:t>
             </a:r>
           </a:p>
@@ -3599,6 +3870,81 @@
           </a:p>
         </p:txBody>
       </p:sp>
+    </p:spTree>
+  </p:cSld>
+  <p:clrMapOvr>
+    <a:masterClrMapping/>
+  </p:clrMapOvr>
+</p:sld>
+</file>
+
+<file path=ppt/slides/slide15.xml><?xml version="1.0" encoding="utf-8"?>
+<p:sld xmlns:a="http://schemas.openxmlformats.org/drawingml/2006/main" xmlns:p="http://schemas.openxmlformats.org/presentationml/2006/main" xmlns:r="http://schemas.openxmlformats.org/officeDocument/2006/relationships">
+  <p:cSld>
+    <p:spTree>
+      <p:nvGrpSpPr>
+        <p:cNvPr id="1" name=""/>
+        <p:cNvGrpSpPr/>
+        <p:nvPr/>
+      </p:nvGrpSpPr>
+      <p:grpSpPr/>
+      <p:sp>
+        <p:nvSpPr>
+          <p:cNvPr id="2" name="TextBox 1"/>
+          <p:cNvSpPr txBox="1"/>
+          <p:nvPr/>
+        </p:nvSpPr>
+        <p:spPr>
+          <a:xfrm>
+            <a:off x="457200" y="274320"/>
+            <a:ext cx="8229600" cy="640080"/>
+          </a:xfrm>
+          <a:prstGeom prst="rect">
+            <a:avLst/>
+          </a:prstGeom>
+          <a:noFill/>
+        </p:spPr>
+        <p:txBody>
+          <a:bodyPr wrap="square">
+            <a:spAutoFit/>
+          </a:bodyPr>
+          <a:lstStyle/>
+          <a:p>
+            <a:r>
+              <a:rPr sz="2200" b="1">
+                <a:solidFill>
+                  <a:srgbClr val="0B3D2E"/>
+                </a:solidFill>
+              </a:rPr>
+              <a:t>Diagrama de la clase</a:t>
+            </a:r>
+          </a:p>
+        </p:txBody>
+      </p:sp>
+      <p:pic>
+        <p:nvPicPr>
+          <p:cNvPr id="3" name="Picture 2" descr="dcfee7c75bdb01b6.png"/>
+          <p:cNvPicPr>
+            <a:picLocks noChangeAspect="1"/>
+          </p:cNvPicPr>
+          <p:nvPr/>
+        </p:nvPicPr>
+        <p:blipFill>
+          <a:blip r:embed="rId2"/>
+          <a:stretch>
+            <a:fillRect/>
+          </a:stretch>
+        </p:blipFill>
+        <p:spPr>
+          <a:xfrm>
+            <a:off x="457200" y="3465576"/>
+            <a:ext cx="8229600" cy="566928"/>
+          </a:xfrm>
+          <a:prstGeom prst="rect">
+            <a:avLst/>
+          </a:prstGeom>
+        </p:spPr>
+      </p:pic>
     </p:spTree>
   </p:cSld>
   <p:clrMapOvr>
@@ -3683,7 +4029,7 @@
                   <a:srgbClr val="22282E"/>
                 </a:solidFill>
               </a:rPr>
-              <a:t>•  Integrar todo lo aprendido en una metodología de bug bounty profesional: elegir programas, respetar el scope, hacer reconocimiento eficiente, priorizar vectores por retorno, y —lo más importante— redactar reportes claros con impacto y remediación que sean aceptados y recompensados.</a:t>
+              <a:t>•  Integrar todo lo aprendido en una metodología de bug bounty profesional: elegir programas, respetar el scope, hacer reconocimiento eficiente, priorizar vectores por retorno, y —lo más importante—…</a:t>
             </a:r>
           </a:p>
         </p:txBody>
@@ -4077,7 +4423,7 @@
                   <a:srgbClr val="0B3D2E"/>
                 </a:solidFill>
               </a:rPr>
-              <a:t>📖 Definiciones y características</a:t>
+              <a:t>🧠 Explicación en profundidad</a:t>
             </a:r>
           </a:p>
         </p:txBody>
@@ -4115,82 +4461,97 @@
                   <a:srgbClr val="22282E"/>
                 </a:solidFill>
               </a:rPr>
-              <a:t>•  Bug bounty: programa que recompensa el reporte de vulnerabilidades bajo reglas definidas. Característica: hacking autorizado y con límites.</a:t>
-            </a:r>
-          </a:p>
-          <a:p>
-            <a:pPr>
-              <a:spcAft>
-                <a:spcPts val="600"/>
-              </a:spcAft>
-            </a:pPr>
-            <a:r>
-              <a:rPr sz="1500">
-                <a:solidFill>
-                  <a:srgbClr val="22282E"/>
-                </a:solidFill>
-              </a:rPr>
-              <a:t>•  Scope: activos y pruebas permitidas. Característica: salir de él anula la autorización.</a:t>
-            </a:r>
-          </a:p>
-          <a:p>
-            <a:pPr>
-              <a:spcAft>
-                <a:spcPts val="600"/>
-              </a:spcAft>
-            </a:pPr>
-            <a:r>
-              <a:rPr sz="1500">
-                <a:solidFill>
-                  <a:srgbClr val="22282E"/>
-                </a:solidFill>
-              </a:rPr>
-              <a:t>•  PoC (Proof of Concept): pasos/artefacto que reproducen el bug. Característica: sin reproducibilidad no hay pago.</a:t>
-            </a:r>
-          </a:p>
-          <a:p>
-            <a:pPr>
-              <a:spcAft>
-                <a:spcPts val="600"/>
-              </a:spcAft>
-            </a:pPr>
-            <a:r>
-              <a:rPr sz="1500">
-                <a:solidFill>
-                  <a:srgbClr val="22282E"/>
-                </a:solidFill>
-              </a:rPr>
-              <a:t>•  CVSS: sistema estándar para puntuar severidad. Característica: da un lenguaje común, pero no sustituye el impacto de negocio.</a:t>
-            </a:r>
-          </a:p>
-          <a:p>
-            <a:pPr>
-              <a:spcAft>
-                <a:spcPts val="600"/>
-              </a:spcAft>
-            </a:pPr>
-            <a:r>
-              <a:rPr sz="1500">
-                <a:solidFill>
-                  <a:srgbClr val="22282E"/>
-                </a:solidFill>
-              </a:rPr>
-              <a:t>•  Duplicado: bug ya reportado por otro. Característica: no se recompensa; premia la velocidad y la originalidad.</a:t>
-            </a:r>
-          </a:p>
-          <a:p>
-            <a:pPr>
-              <a:spcAft>
-                <a:spcPts val="600"/>
-              </a:spcAft>
-            </a:pPr>
-            <a:r>
-              <a:rPr sz="1500">
-                <a:solidFill>
-                  <a:srgbClr val="22282E"/>
-                </a:solidFill>
-              </a:rPr>
-              <a:t>•  Divulgación responsable: reportar en privado y esperar la corrección. Característica: protege a usuarios y a tu reputación.</a:t>
+              <a:t>•  El bug bounty es un modelo en el que las organizaciones invitan a investigadores externos a</a:t>
+            </a:r>
+          </a:p>
+          <a:p>
+            <a:pPr>
+              <a:spcAft>
+                <a:spcPts val="600"/>
+              </a:spcAft>
+            </a:pPr>
+            <a:r>
+              <a:rPr sz="1500">
+                <a:solidFill>
+                  <a:srgbClr val="22282E"/>
+                </a:solidFill>
+              </a:rPr>
+              <a:t>•  encontrar vulnerabilidades a cambio de una recompensa por cada una válida. Plataformas como</a:t>
+            </a:r>
+          </a:p>
+          <a:p>
+            <a:pPr>
+              <a:spcAft>
+                <a:spcPts val="600"/>
+              </a:spcAft>
+            </a:pPr>
+            <a:r>
+              <a:rPr sz="1500">
+                <a:solidFill>
+                  <a:srgbClr val="22282E"/>
+                </a:solidFill>
+              </a:rPr>
+              <a:t>•  HackerOne, Bugcrowd e Intigriti intermedian: alojan los programas (el conjunto de</a:t>
+            </a:r>
+          </a:p>
+          <a:p>
+            <a:pPr>
+              <a:spcAft>
+                <a:spcPts val="600"/>
+              </a:spcAft>
+            </a:pPr>
+            <a:r>
+              <a:rPr sz="1500">
+                <a:solidFill>
+                  <a:srgbClr val="22282E"/>
+                </a:solidFill>
+              </a:rPr>
+              <a:t>•  reglas de cada organización), gestionan los reportes y los pagos. Es una vía real de aprendizaje y de</a:t>
+            </a:r>
+          </a:p>
+          <a:p>
+            <a:pPr>
+              <a:spcAft>
+                <a:spcPts val="600"/>
+              </a:spcAft>
+            </a:pPr>
+            <a:r>
+              <a:rPr sz="1500">
+                <a:solidFill>
+                  <a:srgbClr val="22282E"/>
+                </a:solidFill>
+              </a:rPr>
+              <a:t>•  ingresos, pero su premisa fundamental es la misma que la del pentest (clase 067): solo estás</a:t>
+            </a:r>
+          </a:p>
+          <a:p>
+            <a:pPr>
+              <a:spcAft>
+                <a:spcPts val="600"/>
+              </a:spcAft>
+            </a:pPr>
+            <a:r>
+              <a:rPr sz="1500">
+                <a:solidFill>
+                  <a:srgbClr val="22282E"/>
+                </a:solidFill>
+              </a:rPr>
+              <a:t>•  autorizado a probar lo que el programa incluye en su alcance, con las técnicas que permite. Salirse</a:t>
+            </a:r>
+          </a:p>
+          <a:p>
+            <a:pPr>
+              <a:spcAft>
+                <a:spcPts val="600"/>
+              </a:spcAft>
+            </a:pPr>
+            <a:r>
+              <a:rPr sz="1500">
+                <a:solidFill>
+                  <a:srgbClr val="22282E"/>
+                </a:solidFill>
+              </a:rPr>
+              <a:t>•  del scope en bug bounty no es una infracción menor: es acceso no autorizado, con las mismas</a:t>
             </a:r>
           </a:p>
         </p:txBody>
@@ -4241,7 +4602,7 @@
                   <a:srgbClr val="0B3D2E"/>
                 </a:solidFill>
               </a:rPr>
-              <a:t>🧰 Herramientas y preparación</a:t>
+              <a:t>📖 Definiciones y características</a:t>
             </a:r>
           </a:p>
         </p:txBody>
@@ -4279,37 +4640,82 @@
                   <a:srgbClr val="22282E"/>
                 </a:solidFill>
               </a:rPr>
-              <a:t>•  Cuentas en HackerOne, Bugcrowd o Intigriti (lee sus políticas).</a:t>
-            </a:r>
-          </a:p>
-          <a:p>
-            <a:pPr>
-              <a:spcAft>
-                <a:spcPts val="600"/>
-              </a:spcAft>
-            </a:pPr>
-            <a:r>
-              <a:rPr sz="1500">
-                <a:solidFill>
-                  <a:srgbClr val="22282E"/>
-                </a:solidFill>
-              </a:rPr>
-              <a:t>•  Stack de reconocimiento: subfinder/amass, httpx, nuclei, ffuf, Burp.</a:t>
-            </a:r>
-          </a:p>
-          <a:p>
-            <a:pPr>
-              <a:spcAft>
-                <a:spcPts val="600"/>
-              </a:spcAft>
-            </a:pPr>
-            <a:r>
-              <a:rPr sz="1500">
-                <a:solidFill>
-                  <a:srgbClr val="22282E"/>
-                </a:solidFill>
-              </a:rPr>
-              <a:t>•  Plantilla de reporte propia (título, resumen, pasos, impacto, remediación, referencias).</a:t>
+              <a:t>•  Bug bounty: programa que recompensa el reporte de vulnerabilidades bajo reglas definidas. Característica: hacking autorizado y con límites.</a:t>
+            </a:r>
+          </a:p>
+          <a:p>
+            <a:pPr>
+              <a:spcAft>
+                <a:spcPts val="600"/>
+              </a:spcAft>
+            </a:pPr>
+            <a:r>
+              <a:rPr sz="1500">
+                <a:solidFill>
+                  <a:srgbClr val="22282E"/>
+                </a:solidFill>
+              </a:rPr>
+              <a:t>•  Scope: activos y pruebas permitidas. Característica: salir de él anula la autorización.</a:t>
+            </a:r>
+          </a:p>
+          <a:p>
+            <a:pPr>
+              <a:spcAft>
+                <a:spcPts val="600"/>
+              </a:spcAft>
+            </a:pPr>
+            <a:r>
+              <a:rPr sz="1500">
+                <a:solidFill>
+                  <a:srgbClr val="22282E"/>
+                </a:solidFill>
+              </a:rPr>
+              <a:t>•  PoC (Proof of Concept): pasos/artefacto que reproducen el bug. Característica: sin reproducibilidad no hay pago.</a:t>
+            </a:r>
+          </a:p>
+          <a:p>
+            <a:pPr>
+              <a:spcAft>
+                <a:spcPts val="600"/>
+              </a:spcAft>
+            </a:pPr>
+            <a:r>
+              <a:rPr sz="1500">
+                <a:solidFill>
+                  <a:srgbClr val="22282E"/>
+                </a:solidFill>
+              </a:rPr>
+              <a:t>•  CVSS: sistema estándar para puntuar severidad. Característica: da un lenguaje común, pero no sustituye el impacto de negocio.</a:t>
+            </a:r>
+          </a:p>
+          <a:p>
+            <a:pPr>
+              <a:spcAft>
+                <a:spcPts val="600"/>
+              </a:spcAft>
+            </a:pPr>
+            <a:r>
+              <a:rPr sz="1500">
+                <a:solidFill>
+                  <a:srgbClr val="22282E"/>
+                </a:solidFill>
+              </a:rPr>
+              <a:t>•  Duplicado: bug ya reportado por otro. Característica: no se recompensa; premia la velocidad y la originalidad.</a:t>
+            </a:r>
+          </a:p>
+          <a:p>
+            <a:pPr>
+              <a:spcAft>
+                <a:spcPts val="600"/>
+              </a:spcAft>
+            </a:pPr>
+            <a:r>
+              <a:rPr sz="1500">
+                <a:solidFill>
+                  <a:srgbClr val="22282E"/>
+                </a:solidFill>
+              </a:rPr>
+              <a:t>•  Divulgación responsable: reportar en privado y esperar la corrección. Característica: protege a usuarios y a tu reputación.</a:t>
             </a:r>
           </a:p>
         </p:txBody>
@@ -4360,7 +4766,7 @@
                   <a:srgbClr val="0B3D2E"/>
                 </a:solidFill>
               </a:rPr>
-              <a:t>🧪 Laboratorio guiado</a:t>
+              <a:t>📔 Glosario</a:t>
             </a:r>
           </a:p>
         </p:txBody>
@@ -4398,97 +4804,97 @@
                   <a:srgbClr val="22282E"/>
                 </a:solidFill>
               </a:rPr>
-              <a:t>•  Elige un programa y lee su política: scope, exclusiones, pruebas prohibidas, safe harbor.</a:t>
-            </a:r>
-          </a:p>
-          <a:p>
-            <a:pPr>
-              <a:spcAft>
-                <a:spcPts val="600"/>
-              </a:spcAft>
-            </a:pPr>
-            <a:r>
-              <a:rPr sz="1500">
-                <a:solidFill>
-                  <a:srgbClr val="22282E"/>
-                </a:solidFill>
-              </a:rPr>
-              <a:t>•  Monta un flujo de reconocimiento (solo sobre activos en scope): subdominios → hosts vivos → tecnologías → endpoints.</a:t>
-            </a:r>
-          </a:p>
-          <a:p>
-            <a:pPr>
-              <a:spcAft>
-                <a:spcPts val="600"/>
-              </a:spcAft>
-            </a:pPr>
-            <a:r>
-              <a:rPr sz="1500">
-                <a:solidFill>
-                  <a:srgbClr val="22282E"/>
-                </a:solidFill>
-              </a:rPr>
-              <a:t>•  Prioriza por retorno: funciones de negocio críticas, autenticación, APIs, uploads.</a:t>
-            </a:r>
-          </a:p>
-          <a:p>
-            <a:pPr>
-              <a:spcAft>
-                <a:spcPts val="600"/>
-              </a:spcAft>
-            </a:pPr>
-            <a:r>
-              <a:rPr sz="1500">
-                <a:solidFill>
-                  <a:srgbClr val="22282E"/>
-                </a:solidFill>
-              </a:rPr>
-              <a:t>•  Encuentra un hallazgo en tu laboratorio (Juice Shop) y trátalo como si fuera real.</a:t>
-            </a:r>
-          </a:p>
-          <a:p>
-            <a:pPr>
-              <a:spcAft>
-                <a:spcPts val="600"/>
-              </a:spcAft>
-            </a:pPr>
-            <a:r>
-              <a:rPr sz="1500">
-                <a:solidFill>
-                  <a:srgbClr val="22282E"/>
-                </a:solidFill>
-              </a:rPr>
-              <a:t>•  Redacta un reporte completo: título claro, resumen, pasos numerados reproducibles, PoC, impacto y remediación.</a:t>
-            </a:r>
-          </a:p>
-          <a:p>
-            <a:pPr>
-              <a:spcAft>
-                <a:spcPts val="600"/>
-              </a:spcAft>
-            </a:pPr>
-            <a:r>
-              <a:rPr sz="1500">
-                <a:solidFill>
-                  <a:srgbClr val="22282E"/>
-                </a:solidFill>
-              </a:rPr>
-              <a:t>•  Calcula el CVSS del hallazgo con la calculadora oficial y justifica el vector.</a:t>
-            </a:r>
-          </a:p>
-          <a:p>
-            <a:pPr>
-              <a:spcAft>
-                <a:spcPts val="600"/>
-              </a:spcAft>
-            </a:pPr>
-            <a:r>
-              <a:rPr sz="1500">
-                <a:solidFill>
-                  <a:srgbClr val="22282E"/>
-                </a:solidFill>
-              </a:rPr>
-              <a:t>•  Revisa el reporte con ojo crítico: ¿podría reproducirlo alguien sin contexto?</a:t>
+              <a:t>•  Término — Definición concisa</a:t>
+            </a:r>
+          </a:p>
+          <a:p>
+            <a:pPr>
+              <a:spcAft>
+                <a:spcPts val="600"/>
+              </a:spcAft>
+            </a:pPr>
+            <a:r>
+              <a:rPr sz="1500">
+                <a:solidFill>
+                  <a:srgbClr val="22282E"/>
+                </a:solidFill>
+              </a:rPr>
+              <a:t>•  Bug bounty — Recompensa por vulnerabilidades reportadas</a:t>
+            </a:r>
+          </a:p>
+          <a:p>
+            <a:pPr>
+              <a:spcAft>
+                <a:spcPts val="600"/>
+              </a:spcAft>
+            </a:pPr>
+            <a:r>
+              <a:rPr sz="1500">
+                <a:solidFill>
+                  <a:srgbClr val="22282E"/>
+                </a:solidFill>
+              </a:rPr>
+              <a:t>•  HackerOne / Bugcrowd / Intigriti — Plataformas que alojan programas</a:t>
+            </a:r>
+          </a:p>
+          <a:p>
+            <a:pPr>
+              <a:spcAft>
+                <a:spcPts val="600"/>
+              </a:spcAft>
+            </a:pPr>
+            <a:r>
+              <a:rPr sz="1500">
+                <a:solidFill>
+                  <a:srgbClr val="22282E"/>
+                </a:solidFill>
+              </a:rPr>
+              <a:t>•  Programa — Reglas y alcance de una organización</a:t>
+            </a:r>
+          </a:p>
+          <a:p>
+            <a:pPr>
+              <a:spcAft>
+                <a:spcPts val="600"/>
+              </a:spcAft>
+            </a:pPr>
+            <a:r>
+              <a:rPr sz="1500">
+                <a:solidFill>
+                  <a:srgbClr val="22282E"/>
+                </a:solidFill>
+              </a:rPr>
+              <a:t>•  Scope — Activos autorizados; fuera de él es acceso no autorizado</a:t>
+            </a:r>
+          </a:p>
+          <a:p>
+            <a:pPr>
+              <a:spcAft>
+                <a:spcPts val="600"/>
+              </a:spcAft>
+            </a:pPr>
+            <a:r>
+              <a:rPr sz="1500">
+                <a:solidFill>
+                  <a:srgbClr val="22282E"/>
+                </a:solidFill>
+              </a:rPr>
+              <a:t>•  Exclusiones — Dominios o técnicas explícitamente prohibidos</a:t>
+            </a:r>
+          </a:p>
+          <a:p>
+            <a:pPr>
+              <a:spcAft>
+                <a:spcPts val="600"/>
+              </a:spcAft>
+            </a:pPr>
+            <a:r>
+              <a:rPr sz="1500">
+                <a:solidFill>
+                  <a:srgbClr val="22282E"/>
+                </a:solidFill>
+              </a:rPr>
+              <a:t>•  Técnica prohibida — DoS, ingeniería social, escaneo agresivo (habitual)</a:t>
             </a:r>
           </a:p>
         </p:txBody>
@@ -4539,7 +4945,7 @@
                   <a:srgbClr val="0B3D2E"/>
                 </a:solidFill>
               </a:rPr>
-              <a:t>✍️ Ejercicios</a:t>
+              <a:t>🧰 Herramientas y preparación</a:t>
             </a:r>
           </a:p>
         </p:txBody>
@@ -4577,82 +4983,37 @@
                   <a:srgbClr val="22282E"/>
                 </a:solidFill>
               </a:rPr>
-              <a:t>•  Resume el scope y las reglas de un programa real en 5 puntos.</a:t>
-            </a:r>
-          </a:p>
-          <a:p>
-            <a:pPr>
-              <a:spcAft>
-                <a:spcPts val="600"/>
-              </a:spcAft>
-            </a:pPr>
-            <a:r>
-              <a:rPr sz="1500">
-                <a:solidFill>
-                  <a:srgbClr val="22282E"/>
-                </a:solidFill>
-              </a:rPr>
-              <a:t>•  Diseña tu pipeline de reconocimiento con comandos concretos.</a:t>
-            </a:r>
-          </a:p>
-          <a:p>
-            <a:pPr>
-              <a:spcAft>
-                <a:spcPts val="600"/>
-              </a:spcAft>
-            </a:pPr>
-            <a:r>
-              <a:rPr sz="1500">
-                <a:solidFill>
-                  <a:srgbClr val="22282E"/>
-                </a:solidFill>
-              </a:rPr>
-              <a:t>•  Prioriza 5 vectores de una app hipotética por probabilidad × impacto.</a:t>
-            </a:r>
-          </a:p>
-          <a:p>
-            <a:pPr>
-              <a:spcAft>
-                <a:spcPts val="600"/>
-              </a:spcAft>
-            </a:pPr>
-            <a:r>
-              <a:rPr sz="1500">
-                <a:solidFill>
-                  <a:srgbClr val="22282E"/>
-                </a:solidFill>
-              </a:rPr>
-              <a:t>•  Redacta un reporte de un XSS almacenado de Juice Shop con todos los apartados.</a:t>
-            </a:r>
-          </a:p>
-          <a:p>
-            <a:pPr>
-              <a:spcAft>
-                <a:spcPts val="600"/>
-              </a:spcAft>
-            </a:pPr>
-            <a:r>
-              <a:rPr sz="1500">
-                <a:solidFill>
-                  <a:srgbClr val="22282E"/>
-                </a:solidFill>
-              </a:rPr>
-              <a:t>•  Calcula el CVSS de ese XSS y explica cada métrica.</a:t>
-            </a:r>
-          </a:p>
-          <a:p>
-            <a:pPr>
-              <a:spcAft>
-                <a:spcPts val="600"/>
-              </a:spcAft>
-            </a:pPr>
-            <a:r>
-              <a:rPr sz="1500">
-                <a:solidFill>
-                  <a:srgbClr val="22282E"/>
-                </a:solidFill>
-              </a:rPr>
-              <a:t>•  Explica qué es el safe harbor y por qué importa legalmente.</a:t>
+              <a:t>•  Cuentas en HackerOne, Bugcrowd o Intigriti (lee sus políticas).</a:t>
+            </a:r>
+          </a:p>
+          <a:p>
+            <a:pPr>
+              <a:spcAft>
+                <a:spcPts val="600"/>
+              </a:spcAft>
+            </a:pPr>
+            <a:r>
+              <a:rPr sz="1500">
+                <a:solidFill>
+                  <a:srgbClr val="22282E"/>
+                </a:solidFill>
+              </a:rPr>
+              <a:t>•  Stack de reconocimiento: subfinder/amass, httpx, nuclei, ffuf, Burp.</a:t>
+            </a:r>
+          </a:p>
+          <a:p>
+            <a:pPr>
+              <a:spcAft>
+                <a:spcPts val="600"/>
+              </a:spcAft>
+            </a:pPr>
+            <a:r>
+              <a:rPr sz="1500">
+                <a:solidFill>
+                  <a:srgbClr val="22282E"/>
+                </a:solidFill>
+              </a:rPr>
+              <a:t>•  Plantilla de reporte propia (título, resumen, pasos, impacto, remediación, referencias).</a:t>
             </a:r>
           </a:p>
         </p:txBody>
@@ -4703,7 +5064,7 @@
                   <a:srgbClr val="0B3D2E"/>
                 </a:solidFill>
               </a:rPr>
-              <a:t>📝 Reto verificable</a:t>
+              <a:t>🧪 Laboratorio guiado</a:t>
             </a:r>
           </a:p>
         </p:txBody>
@@ -4741,22 +5102,97 @@
                   <a:srgbClr val="22282E"/>
                 </a:solidFill>
               </a:rPr>
-              <a:t>•  Escribe un reporte de bug bounty completo y reproducible de una vulnerabilidad hallada en tu laboratorio, con CVSS calculado y sección de remediación.</a:t>
-            </a:r>
-          </a:p>
-          <a:p>
-            <a:pPr>
-              <a:spcAft>
-                <a:spcPts val="600"/>
-              </a:spcAft>
-            </a:pPr>
-            <a:r>
-              <a:rPr sz="1500">
-                <a:solidFill>
-                  <a:srgbClr val="22282E"/>
-                </a:solidFill>
-              </a:rPr>
-              <a:t>•  Criterio de aceptación: un tercero puede reproducir el bug siguiendo solo tu reporte; incluye título, impacto de negocio, pasos con PoC, CVSS justificado y remediación accionable.</a:t>
+              <a:t>•  Elige un programa y lee su política: scope, exclusiones, pruebas prohibidas, safe harbor.</a:t>
+            </a:r>
+          </a:p>
+          <a:p>
+            <a:pPr>
+              <a:spcAft>
+                <a:spcPts val="600"/>
+              </a:spcAft>
+            </a:pPr>
+            <a:r>
+              <a:rPr sz="1500">
+                <a:solidFill>
+                  <a:srgbClr val="22282E"/>
+                </a:solidFill>
+              </a:rPr>
+              <a:t>•  Monta un flujo de reconocimiento (solo sobre activos en scope): subdominios → hosts vivos → tecnologías → endpoints.</a:t>
+            </a:r>
+          </a:p>
+          <a:p>
+            <a:pPr>
+              <a:spcAft>
+                <a:spcPts val="600"/>
+              </a:spcAft>
+            </a:pPr>
+            <a:r>
+              <a:rPr sz="1500">
+                <a:solidFill>
+                  <a:srgbClr val="22282E"/>
+                </a:solidFill>
+              </a:rPr>
+              <a:t>•  Prioriza por retorno: funciones de negocio críticas, autenticación, APIs, uploads.</a:t>
+            </a:r>
+          </a:p>
+          <a:p>
+            <a:pPr>
+              <a:spcAft>
+                <a:spcPts val="600"/>
+              </a:spcAft>
+            </a:pPr>
+            <a:r>
+              <a:rPr sz="1500">
+                <a:solidFill>
+                  <a:srgbClr val="22282E"/>
+                </a:solidFill>
+              </a:rPr>
+              <a:t>•  Encuentra un hallazgo en tu laboratorio (Juice Shop) y trátalo como si fuera real.</a:t>
+            </a:r>
+          </a:p>
+          <a:p>
+            <a:pPr>
+              <a:spcAft>
+                <a:spcPts val="600"/>
+              </a:spcAft>
+            </a:pPr>
+            <a:r>
+              <a:rPr sz="1500">
+                <a:solidFill>
+                  <a:srgbClr val="22282E"/>
+                </a:solidFill>
+              </a:rPr>
+              <a:t>•  Redacta un reporte completo: título claro, resumen, pasos numerados reproducibles, PoC, impacto y remediación.</a:t>
+            </a:r>
+          </a:p>
+          <a:p>
+            <a:pPr>
+              <a:spcAft>
+                <a:spcPts val="600"/>
+              </a:spcAft>
+            </a:pPr>
+            <a:r>
+              <a:rPr sz="1500">
+                <a:solidFill>
+                  <a:srgbClr val="22282E"/>
+                </a:solidFill>
+              </a:rPr>
+              <a:t>•  Calcula el CVSS del hallazgo con la calculadora oficial y justifica el vector.</a:t>
+            </a:r>
+          </a:p>
+          <a:p>
+            <a:pPr>
+              <a:spcAft>
+                <a:spcPts val="600"/>
+              </a:spcAft>
+            </a:pPr>
+            <a:r>
+              <a:rPr sz="1500">
+                <a:solidFill>
+                  <a:srgbClr val="22282E"/>
+                </a:solidFill>
+              </a:rPr>
+              <a:t>•  Revisa el reporte con ojo crítico: ¿podría reproducirlo alguien sin contexto?</a:t>
             </a:r>
           </a:p>
         </p:txBody>
